--- a/atolye_icerik/sunumlar/en/03_unity_cli_joint_session.pptx
+++ b/atolye_icerik/sunumlar/en/03_unity_cli_joint_session.pptx
@@ -6852,7 +6852,7 @@
                 <a:ea typeface="Arial" pitchFamily="34" charset="-122"/>
                 <a:cs typeface="Arial" pitchFamily="34" charset="-120"/>
               </a:rPr>
-              <a:t>Two tracks at 13:30: engineering runs this flow themselves, art builds the production pipeline.</a:t>
+              <a:t>Two tracks back to back with one trainer: engineering at 13:30, art at 15:15 — anyone is welcome to sit in on the other track.</a:t>
             </a:r>
             <a:endParaRPr lang="en-US" sz="3000" dirty="0"/>
           </a:p>
